--- a/examples/ppt/tables/tables-borders.pptx
+++ b/examples/ppt/tables/tables-borders.pptx
@@ -5,9 +5,9 @@
     <p:sldMasterId xmlns:r="http://schemas.openxmlformats.org/officeDocument/2006/relationships" id="2147483648" r:id="rId1"/>
   </p:sldMasterIdLst>
   <p:sldIdLst>
-    <p:sldId id="256" r:id="Rbfd62771f3464af5"/>
-    <p:sldId id="257" r:id="Ra81b0c6e515b48fb"/>
-    <p:sldId id="258" r:id="Rd485c61041c4436b"/>
+    <p:sldId id="256" r:id="R8d106776ca1d4529"/>
+    <p:sldId id="257" r:id="Rfb728b6e335c4b71"/>
+    <p:sldId id="258" r:id="R0e9ded95729e45e4"/>
   </p:sldIdLst>
   <p:sldSz cx="12192000" cy="6858000"/>
   <p:notesSz cx="6858000" cy="9144000"/>
@@ -305,7 +305,7 @@
 </file>
 
 <file path=ppt/slides/slide1.xml><?xml version="1.0" encoding="utf-8"?>
-<p:sld xmlns:a="http://schemas.openxmlformats.org/drawingml/2006/main" xmlns:p="http://schemas.openxmlformats.org/presentationml/2006/main">
+<p:sld xmlns:p="http://schemas.openxmlformats.org/presentationml/2006/main">
   <p:cSld>
     <p:spTree>
       <p:nvGrpSpPr>
@@ -316,8 +316,8 @@
       <p:grpSpPr/>
       <p:sp>
         <p:nvSpPr>
-          <p:cNvPr id="10000" name="TextBox 1"/>
-          <p:cNvSpPr/>
+          <p:cNvPr id="100000" name="TextBox 1"/>
+          <p:cNvSpPr txBox="1"/>
           <p:nvPr/>
         </p:nvSpPr>
         <p:spPr>
@@ -328,11 +328,6 @@
           <a:prstGeom xmlns:a="http://schemas.openxmlformats.org/drawingml/2006/main" prst="rect">
             <a:avLst/>
           </a:prstGeom>
-          <a:ln xmlns:a="http://schemas.openxmlformats.org/drawingml/2006/main" w="9525">
-            <a:solidFill>
-              <a:srgbClr val="595959"/>
-            </a:solidFill>
-          </a:ln>
         </p:spPr>
         <p:txBody>
           <a:bodyPr xmlns:a="http://schemas.openxmlformats.org/drawingml/2006/main"/>
@@ -347,8 +342,8 @@
       </p:sp>
       <p:sp>
         <p:nvSpPr>
-          <p:cNvPr id="10001" name="TextBox 2"/>
-          <p:cNvSpPr/>
+          <p:cNvPr id="100001" name="TextBox 2"/>
+          <p:cNvSpPr txBox="1"/>
           <p:nvPr/>
         </p:nvSpPr>
         <p:spPr>
@@ -359,11 +354,6 @@
           <a:prstGeom xmlns:a="http://schemas.openxmlformats.org/drawingml/2006/main" prst="rect">
             <a:avLst/>
           </a:prstGeom>
-          <a:ln xmlns:a="http://schemas.openxmlformats.org/drawingml/2006/main" w="9525">
-            <a:solidFill>
-              <a:srgbClr val="595959"/>
-            </a:solidFill>
-          </a:ln>
         </p:spPr>
         <p:txBody>
           <a:bodyPr xmlns:a="http://schemas.openxmlformats.org/drawingml/2006/main"/>
@@ -378,7 +368,7 @@
       </p:sp>
       <p:graphicFrame>
         <p:nvGraphicFramePr>
-          <p:cNvPr id="10002" name="Table 1"/>
+          <p:cNvPr id="100002" name="Table 1"/>
           <p:cNvGraphicFramePr/>
           <p:nvPr/>
         </p:nvGraphicFramePr>
@@ -867,8 +857,8 @@
       </p:graphicFrame>
       <p:sp>
         <p:nvSpPr>
-          <p:cNvPr id="10003" name="TextBox 3"/>
-          <p:cNvSpPr/>
+          <p:cNvPr id="100003" name="TextBox 3"/>
+          <p:cNvSpPr txBox="1"/>
           <p:nvPr/>
         </p:nvSpPr>
         <p:spPr>
@@ -879,11 +869,6 @@
           <a:prstGeom xmlns:a="http://schemas.openxmlformats.org/drawingml/2006/main" prst="rect">
             <a:avLst/>
           </a:prstGeom>
-          <a:ln xmlns:a="http://schemas.openxmlformats.org/drawingml/2006/main" w="9525">
-            <a:solidFill>
-              <a:srgbClr val="595959"/>
-            </a:solidFill>
-          </a:ln>
         </p:spPr>
         <p:txBody>
           <a:bodyPr xmlns:a="http://schemas.openxmlformats.org/drawingml/2006/main"/>
@@ -898,7 +883,7 @@
       </p:sp>
       <p:graphicFrame>
         <p:nvGraphicFramePr>
-          <p:cNvPr id="10004" name="Table 2"/>
+          <p:cNvPr id="100004" name="Table 2"/>
           <p:cNvGraphicFramePr/>
           <p:nvPr/>
         </p:nvGraphicFramePr>
@@ -1387,8 +1372,8 @@
       </p:graphicFrame>
       <p:sp>
         <p:nvSpPr>
-          <p:cNvPr id="10005" name="TextBox 4"/>
-          <p:cNvSpPr/>
+          <p:cNvPr id="100005" name="TextBox 4"/>
+          <p:cNvSpPr txBox="1"/>
           <p:nvPr/>
         </p:nvSpPr>
         <p:spPr>
@@ -1399,11 +1384,6 @@
           <a:prstGeom xmlns:a="http://schemas.openxmlformats.org/drawingml/2006/main" prst="rect">
             <a:avLst/>
           </a:prstGeom>
-          <a:ln xmlns:a="http://schemas.openxmlformats.org/drawingml/2006/main" w="9525">
-            <a:solidFill>
-              <a:srgbClr val="595959"/>
-            </a:solidFill>
-          </a:ln>
         </p:spPr>
         <p:txBody>
           <a:bodyPr xmlns:a="http://schemas.openxmlformats.org/drawingml/2006/main"/>
@@ -1418,7 +1398,7 @@
       </p:sp>
       <p:graphicFrame>
         <p:nvGraphicFramePr>
-          <p:cNvPr id="10006" name="Table 3"/>
+          <p:cNvPr id="100006" name="Table 3"/>
           <p:cNvGraphicFramePr/>
           <p:nvPr/>
         </p:nvGraphicFramePr>
@@ -1763,8 +1743,8 @@
       </p:graphicFrame>
       <p:sp>
         <p:nvSpPr>
-          <p:cNvPr id="10007" name="TextBox 5"/>
-          <p:cNvSpPr/>
+          <p:cNvPr id="100007" name="TextBox 5"/>
+          <p:cNvSpPr txBox="1"/>
           <p:nvPr/>
         </p:nvSpPr>
         <p:spPr>
@@ -1775,11 +1755,6 @@
           <a:prstGeom xmlns:a="http://schemas.openxmlformats.org/drawingml/2006/main" prst="rect">
             <a:avLst/>
           </a:prstGeom>
-          <a:ln xmlns:a="http://schemas.openxmlformats.org/drawingml/2006/main" w="9525">
-            <a:solidFill>
-              <a:srgbClr val="595959"/>
-            </a:solidFill>
-          </a:ln>
         </p:spPr>
         <p:txBody>
           <a:bodyPr xmlns:a="http://schemas.openxmlformats.org/drawingml/2006/main"/>
@@ -1794,7 +1769,7 @@
       </p:sp>
       <p:graphicFrame>
         <p:nvGraphicFramePr>
-          <p:cNvPr id="10008" name="Table 4"/>
+          <p:cNvPr id="100008" name="Table 4"/>
           <p:cNvGraphicFramePr/>
           <p:nvPr/>
         </p:nvGraphicFramePr>
@@ -2004,8 +1979,8 @@
       </p:graphicFrame>
       <p:sp>
         <p:nvSpPr>
-          <p:cNvPr id="10009" name="TextBox 6"/>
-          <p:cNvSpPr/>
+          <p:cNvPr id="100009" name="TextBox 6"/>
+          <p:cNvSpPr txBox="1"/>
           <p:nvPr/>
         </p:nvSpPr>
         <p:spPr>
@@ -2016,11 +1991,6 @@
           <a:prstGeom xmlns:a="http://schemas.openxmlformats.org/drawingml/2006/main" prst="rect">
             <a:avLst/>
           </a:prstGeom>
-          <a:ln xmlns:a="http://schemas.openxmlformats.org/drawingml/2006/main" w="9525">
-            <a:solidFill>
-              <a:srgbClr val="595959"/>
-            </a:solidFill>
-          </a:ln>
         </p:spPr>
         <p:txBody>
           <a:bodyPr xmlns:a="http://schemas.openxmlformats.org/drawingml/2006/main"/>
@@ -2035,7 +2005,7 @@
       </p:sp>
       <p:graphicFrame>
         <p:nvGraphicFramePr>
-          <p:cNvPr id="10010" name="Table 5"/>
+          <p:cNvPr id="100010" name="Table 5"/>
           <p:cNvGraphicFramePr/>
           <p:nvPr/>
         </p:nvGraphicFramePr>
@@ -2245,8 +2215,8 @@
       </p:graphicFrame>
       <p:sp>
         <p:nvSpPr>
-          <p:cNvPr id="10011" name="TextBox 7"/>
-          <p:cNvSpPr/>
+          <p:cNvPr id="100011" name="TextBox 7"/>
+          <p:cNvSpPr txBox="1"/>
           <p:nvPr/>
         </p:nvSpPr>
         <p:spPr>
@@ -2257,11 +2227,6 @@
           <a:prstGeom xmlns:a="http://schemas.openxmlformats.org/drawingml/2006/main" prst="rect">
             <a:avLst/>
           </a:prstGeom>
-          <a:ln xmlns:a="http://schemas.openxmlformats.org/drawingml/2006/main" w="9525">
-            <a:solidFill>
-              <a:srgbClr val="595959"/>
-            </a:solidFill>
-          </a:ln>
         </p:spPr>
         <p:txBody>
           <a:bodyPr xmlns:a="http://schemas.openxmlformats.org/drawingml/2006/main"/>
@@ -2276,7 +2241,7 @@
       </p:sp>
       <p:graphicFrame>
         <p:nvGraphicFramePr>
-          <p:cNvPr id="10012" name="Table 6"/>
+          <p:cNvPr id="100012" name="Table 6"/>
           <p:cNvGraphicFramePr/>
           <p:nvPr/>
         </p:nvGraphicFramePr>
@@ -2491,13 +2456,256 @@
           </a:graphicData>
         </a:graphic>
       </p:graphicFrame>
+      <p:sp>
+        <p:nvSpPr>
+          <p:cNvPr id="100013" name="TextBox 8"/>
+          <p:cNvSpPr txBox="1"/>
+          <p:nvPr/>
+        </p:nvSpPr>
+        <p:spPr>
+          <a:xfrm xmlns:a="http://schemas.openxmlformats.org/drawingml/2006/main">
+            <a:off x="457200" y="5303520"/>
+            <a:ext cx="3657600" cy="274320"/>
+          </a:xfrm>
+          <a:prstGeom xmlns:a="http://schemas.openxmlformats.org/drawingml/2006/main" prst="rect">
+            <a:avLst/>
+          </a:prstGeom>
+        </p:spPr>
+        <p:txBody>
+          <a:bodyPr xmlns:a="http://schemas.openxmlformats.org/drawingml/2006/main"/>
+          <a:lstStyle xmlns:a="http://schemas.openxmlformats.org/drawingml/2006/main"/>
+          <a:p xmlns:a="http://schemas.openxmlformats.org/drawingml/2006/main">
+            <a:r>
+              <a:rPr lang="en-US" sz="1200" b="1"/>
+              <a:t>border.right=3pt solid C00000</a:t>
+            </a:r>
+          </a:p>
+        </p:txBody>
+      </p:sp>
+      <p:graphicFrame>
+        <p:nvGraphicFramePr>
+          <p:cNvPr id="100014" name="Table 7"/>
+          <p:cNvGraphicFramePr/>
+          <p:nvPr/>
+        </p:nvGraphicFramePr>
+        <p:xfrm>
+          <a:off xmlns:a="http://schemas.openxmlformats.org/drawingml/2006/main" x="457200" y="5623560"/>
+          <a:ext xmlns:a="http://schemas.openxmlformats.org/drawingml/2006/main" cx="3200400" cy="1645920"/>
+        </p:xfrm>
+        <a:graphic xmlns:a="http://schemas.openxmlformats.org/drawingml/2006/main">
+          <a:graphicData uri="http://schemas.openxmlformats.org/drawingml/2006/table">
+            <a:tbl>
+              <a:tblPr firstRow="1" bandRow="1">
+                <a:tableStyleId>{2D5ABB26-0587-4C30-8999-92F81FD0307C}</a:tableStyleId>
+              </a:tblPr>
+              <a:tblGrid>
+                <a:gridCol w="1066800"/>
+                <a:gridCol w="1066800"/>
+                <a:gridCol w="1066800"/>
+              </a:tblGrid>
+              <a:tr h="411480">
+                <a:tc>
+                  <a:txBody>
+                    <a:bodyPr/>
+                    <a:lstStyle/>
+                    <a:p>
+                      <a:r>
+                        <a:rPr lang="en-US"/>
+                        <a:t>A</a:t>
+                      </a:r>
+                    </a:p>
+                  </a:txBody>
+                  <a:tcPr/>
+                </a:tc>
+                <a:tc>
+                  <a:txBody>
+                    <a:bodyPr/>
+                    <a:lstStyle/>
+                    <a:p>
+                      <a:r>
+                        <a:rPr lang="en-US"/>
+                        <a:t>B</a:t>
+                      </a:r>
+                    </a:p>
+                  </a:txBody>
+                  <a:tcPr/>
+                </a:tc>
+                <a:tc>
+                  <a:txBody>
+                    <a:bodyPr/>
+                    <a:lstStyle/>
+                    <a:p>
+                      <a:r>
+                        <a:rPr lang="en-US"/>
+                        <a:t>C</a:t>
+                      </a:r>
+                    </a:p>
+                  </a:txBody>
+                  <a:tcPr>
+                    <a:lnR w="38100">
+                      <a:solidFill>
+                        <a:srgbClr val="C00000"/>
+                      </a:solidFill>
+                      <a:prstDash val="solid"/>
+                    </a:lnR>
+                  </a:tcPr>
+                </a:tc>
+              </a:tr>
+              <a:tr h="411480">
+                <a:tc>
+                  <a:txBody>
+                    <a:bodyPr/>
+                    <a:lstStyle/>
+                    <a:p>
+                      <a:r>
+                        <a:rPr lang="en-US"/>
+                        <a:t>1</a:t>
+                      </a:r>
+                    </a:p>
+                  </a:txBody>
+                  <a:tcPr/>
+                </a:tc>
+                <a:tc>
+                  <a:txBody>
+                    <a:bodyPr/>
+                    <a:lstStyle/>
+                    <a:p>
+                      <a:r>
+                        <a:rPr lang="en-US"/>
+                        <a:t>2</a:t>
+                      </a:r>
+                    </a:p>
+                  </a:txBody>
+                  <a:tcPr/>
+                </a:tc>
+                <a:tc>
+                  <a:txBody>
+                    <a:bodyPr/>
+                    <a:lstStyle/>
+                    <a:p>
+                      <a:r>
+                        <a:rPr lang="en-US"/>
+                        <a:t>3</a:t>
+                      </a:r>
+                    </a:p>
+                  </a:txBody>
+                  <a:tcPr>
+                    <a:lnR w="38100">
+                      <a:solidFill>
+                        <a:srgbClr val="C00000"/>
+                      </a:solidFill>
+                      <a:prstDash val="solid"/>
+                    </a:lnR>
+                  </a:tcPr>
+                </a:tc>
+              </a:tr>
+              <a:tr h="411480">
+                <a:tc>
+                  <a:txBody>
+                    <a:bodyPr/>
+                    <a:lstStyle/>
+                    <a:p>
+                      <a:r>
+                        <a:rPr lang="en-US"/>
+                        <a:t>4</a:t>
+                      </a:r>
+                    </a:p>
+                  </a:txBody>
+                  <a:tcPr/>
+                </a:tc>
+                <a:tc>
+                  <a:txBody>
+                    <a:bodyPr/>
+                    <a:lstStyle/>
+                    <a:p>
+                      <a:r>
+                        <a:rPr lang="en-US"/>
+                        <a:t>5</a:t>
+                      </a:r>
+                    </a:p>
+                  </a:txBody>
+                  <a:tcPr/>
+                </a:tc>
+                <a:tc>
+                  <a:txBody>
+                    <a:bodyPr/>
+                    <a:lstStyle/>
+                    <a:p>
+                      <a:r>
+                        <a:rPr lang="en-US"/>
+                        <a:t>6</a:t>
+                      </a:r>
+                    </a:p>
+                  </a:txBody>
+                  <a:tcPr>
+                    <a:lnR w="38100">
+                      <a:solidFill>
+                        <a:srgbClr val="C00000"/>
+                      </a:solidFill>
+                      <a:prstDash val="solid"/>
+                    </a:lnR>
+                  </a:tcPr>
+                </a:tc>
+              </a:tr>
+              <a:tr h="411480">
+                <a:tc>
+                  <a:txBody>
+                    <a:bodyPr/>
+                    <a:lstStyle/>
+                    <a:p>
+                      <a:r>
+                        <a:rPr lang="en-US"/>
+                        <a:t>7</a:t>
+                      </a:r>
+                    </a:p>
+                  </a:txBody>
+                  <a:tcPr/>
+                </a:tc>
+                <a:tc>
+                  <a:txBody>
+                    <a:bodyPr/>
+                    <a:lstStyle/>
+                    <a:p>
+                      <a:r>
+                        <a:rPr lang="en-US"/>
+                        <a:t>8</a:t>
+                      </a:r>
+                    </a:p>
+                  </a:txBody>
+                  <a:tcPr/>
+                </a:tc>
+                <a:tc>
+                  <a:txBody>
+                    <a:bodyPr/>
+                    <a:lstStyle/>
+                    <a:p>
+                      <a:r>
+                        <a:rPr lang="en-US"/>
+                        <a:t>9</a:t>
+                      </a:r>
+                    </a:p>
+                  </a:txBody>
+                  <a:tcPr>
+                    <a:lnR w="38100">
+                      <a:solidFill>
+                        <a:srgbClr val="C00000"/>
+                      </a:solidFill>
+                      <a:prstDash val="solid"/>
+                    </a:lnR>
+                  </a:tcPr>
+                </a:tc>
+              </a:tr>
+            </a:tbl>
+          </a:graphicData>
+        </a:graphic>
+      </p:graphicFrame>
     </p:spTree>
   </p:cSld>
 </p:sld>
 </file>
 
 <file path=ppt/slides/slide2.xml><?xml version="1.0" encoding="utf-8"?>
-<p:sld xmlns:a="http://schemas.openxmlformats.org/drawingml/2006/main" xmlns:p="http://schemas.openxmlformats.org/presentationml/2006/main">
+<p:sld xmlns:p="http://schemas.openxmlformats.org/presentationml/2006/main">
   <p:cSld>
     <p:spTree>
       <p:nvGrpSpPr>
@@ -2508,8 +2716,8 @@
       <p:grpSpPr/>
       <p:sp>
         <p:nvSpPr>
-          <p:cNvPr id="10013" name="TextBox 1"/>
-          <p:cNvSpPr/>
+          <p:cNvPr id="100015" name="TextBox 1"/>
+          <p:cNvSpPr txBox="1"/>
           <p:nvPr/>
         </p:nvSpPr>
         <p:spPr>
@@ -2520,11 +2728,6 @@
           <a:prstGeom xmlns:a="http://schemas.openxmlformats.org/drawingml/2006/main" prst="rect">
             <a:avLst/>
           </a:prstGeom>
-          <a:ln xmlns:a="http://schemas.openxmlformats.org/drawingml/2006/main" w="9525">
-            <a:solidFill>
-              <a:srgbClr val="595959"/>
-            </a:solidFill>
-          </a:ln>
         </p:spPr>
         <p:txBody>
           <a:bodyPr xmlns:a="http://schemas.openxmlformats.org/drawingml/2006/main"/>
@@ -2539,8 +2742,8 @@
       </p:sp>
       <p:sp>
         <p:nvSpPr>
-          <p:cNvPr id="10014" name="TextBox 2"/>
-          <p:cNvSpPr/>
+          <p:cNvPr id="100016" name="TextBox 2"/>
+          <p:cNvSpPr txBox="1"/>
           <p:nvPr/>
         </p:nvSpPr>
         <p:spPr>
@@ -2551,11 +2754,6 @@
           <a:prstGeom xmlns:a="http://schemas.openxmlformats.org/drawingml/2006/main" prst="rect">
             <a:avLst/>
           </a:prstGeom>
-          <a:ln xmlns:a="http://schemas.openxmlformats.org/drawingml/2006/main" w="9525">
-            <a:solidFill>
-              <a:srgbClr val="595959"/>
-            </a:solidFill>
-          </a:ln>
         </p:spPr>
         <p:txBody>
           <a:bodyPr xmlns:a="http://schemas.openxmlformats.org/drawingml/2006/main"/>
@@ -2570,7 +2768,7 @@
       </p:sp>
       <p:graphicFrame>
         <p:nvGraphicFramePr>
-          <p:cNvPr id="10015" name="Table 1"/>
+          <p:cNvPr id="100017" name="Table 1"/>
           <p:cNvGraphicFramePr/>
           <p:nvPr/>
         </p:nvGraphicFramePr>
@@ -3059,8 +3257,8 @@
       </p:graphicFrame>
       <p:sp>
         <p:nvSpPr>
-          <p:cNvPr id="10016" name="TextBox 3"/>
-          <p:cNvSpPr/>
+          <p:cNvPr id="100018" name="TextBox 3"/>
+          <p:cNvSpPr txBox="1"/>
           <p:nvPr/>
         </p:nvSpPr>
         <p:spPr>
@@ -3071,11 +3269,6 @@
           <a:prstGeom xmlns:a="http://schemas.openxmlformats.org/drawingml/2006/main" prst="rect">
             <a:avLst/>
           </a:prstGeom>
-          <a:ln xmlns:a="http://schemas.openxmlformats.org/drawingml/2006/main" w="9525">
-            <a:solidFill>
-              <a:srgbClr val="595959"/>
-            </a:solidFill>
-          </a:ln>
         </p:spPr>
         <p:txBody>
           <a:bodyPr xmlns:a="http://schemas.openxmlformats.org/drawingml/2006/main"/>
@@ -3090,7 +3283,7 @@
       </p:sp>
       <p:graphicFrame>
         <p:nvGraphicFramePr>
-          <p:cNvPr id="10017" name="Table 2"/>
+          <p:cNvPr id="100019" name="Table 2"/>
           <p:cNvGraphicFramePr/>
           <p:nvPr/>
         </p:nvGraphicFramePr>
@@ -3579,8 +3772,8 @@
       </p:graphicFrame>
       <p:sp>
         <p:nvSpPr>
-          <p:cNvPr id="10018" name="TextBox 4"/>
-          <p:cNvSpPr/>
+          <p:cNvPr id="100020" name="TextBox 4"/>
+          <p:cNvSpPr txBox="1"/>
           <p:nvPr/>
         </p:nvSpPr>
         <p:spPr>
@@ -3591,11 +3784,6 @@
           <a:prstGeom xmlns:a="http://schemas.openxmlformats.org/drawingml/2006/main" prst="rect">
             <a:avLst/>
           </a:prstGeom>
-          <a:ln xmlns:a="http://schemas.openxmlformats.org/drawingml/2006/main" w="9525">
-            <a:solidFill>
-              <a:srgbClr val="595959"/>
-            </a:solidFill>
-          </a:ln>
         </p:spPr>
         <p:txBody>
           <a:bodyPr xmlns:a="http://schemas.openxmlformats.org/drawingml/2006/main"/>
@@ -3610,7 +3798,7 @@
       </p:sp>
       <p:graphicFrame>
         <p:nvGraphicFramePr>
-          <p:cNvPr id="10019" name="Table 3"/>
+          <p:cNvPr id="100021" name="Table 3"/>
           <p:cNvGraphicFramePr/>
           <p:nvPr/>
         </p:nvGraphicFramePr>
@@ -4099,8 +4287,8 @@
       </p:graphicFrame>
       <p:sp>
         <p:nvSpPr>
-          <p:cNvPr id="10020" name="TextBox 5"/>
-          <p:cNvSpPr/>
+          <p:cNvPr id="100022" name="TextBox 5"/>
+          <p:cNvSpPr txBox="1"/>
           <p:nvPr/>
         </p:nvSpPr>
         <p:spPr>
@@ -4111,11 +4299,6 @@
           <a:prstGeom xmlns:a="http://schemas.openxmlformats.org/drawingml/2006/main" prst="rect">
             <a:avLst/>
           </a:prstGeom>
-          <a:ln xmlns:a="http://schemas.openxmlformats.org/drawingml/2006/main" w="9525">
-            <a:solidFill>
-              <a:srgbClr val="595959"/>
-            </a:solidFill>
-          </a:ln>
         </p:spPr>
         <p:txBody>
           <a:bodyPr xmlns:a="http://schemas.openxmlformats.org/drawingml/2006/main"/>
@@ -4130,7 +4313,7 @@
       </p:sp>
       <p:graphicFrame>
         <p:nvGraphicFramePr>
-          <p:cNvPr id="10021" name="Table 4"/>
+          <p:cNvPr id="100023" name="Table 4"/>
           <p:cNvGraphicFramePr/>
           <p:nvPr/>
         </p:nvGraphicFramePr>
@@ -4619,8 +4802,8 @@
       </p:graphicFrame>
       <p:sp>
         <p:nvSpPr>
-          <p:cNvPr id="10022" name="TextBox 6"/>
-          <p:cNvSpPr/>
+          <p:cNvPr id="100024" name="TextBox 6"/>
+          <p:cNvSpPr txBox="1"/>
           <p:nvPr/>
         </p:nvSpPr>
         <p:spPr>
@@ -4631,11 +4814,6 @@
           <a:prstGeom xmlns:a="http://schemas.openxmlformats.org/drawingml/2006/main" prst="rect">
             <a:avLst/>
           </a:prstGeom>
-          <a:ln xmlns:a="http://schemas.openxmlformats.org/drawingml/2006/main" w="9525">
-            <a:solidFill>
-              <a:srgbClr val="595959"/>
-            </a:solidFill>
-          </a:ln>
         </p:spPr>
         <p:txBody>
           <a:bodyPr xmlns:a="http://schemas.openxmlformats.org/drawingml/2006/main"/>
@@ -4650,7 +4828,7 @@
       </p:sp>
       <p:graphicFrame>
         <p:nvGraphicFramePr>
-          <p:cNvPr id="10023" name="Table 5"/>
+          <p:cNvPr id="100025" name="Table 5"/>
           <p:cNvGraphicFramePr/>
           <p:nvPr/>
         </p:nvGraphicFramePr>
@@ -5139,8 +5317,8 @@
       </p:graphicFrame>
       <p:sp>
         <p:nvSpPr>
-          <p:cNvPr id="10024" name="TextBox 7"/>
-          <p:cNvSpPr/>
+          <p:cNvPr id="100026" name="TextBox 7"/>
+          <p:cNvSpPr txBox="1"/>
           <p:nvPr/>
         </p:nvSpPr>
         <p:spPr>
@@ -5151,11 +5329,6 @@
           <a:prstGeom xmlns:a="http://schemas.openxmlformats.org/drawingml/2006/main" prst="rect">
             <a:avLst/>
           </a:prstGeom>
-          <a:ln xmlns:a="http://schemas.openxmlformats.org/drawingml/2006/main" w="9525">
-            <a:solidFill>
-              <a:srgbClr val="595959"/>
-            </a:solidFill>
-          </a:ln>
         </p:spPr>
         <p:txBody>
           <a:bodyPr xmlns:a="http://schemas.openxmlformats.org/drawingml/2006/main"/>
@@ -5170,7 +5343,7 @@
       </p:sp>
       <p:graphicFrame>
         <p:nvGraphicFramePr>
-          <p:cNvPr id="10025" name="Table 6"/>
+          <p:cNvPr id="100027" name="Table 6"/>
           <p:cNvGraphicFramePr/>
           <p:nvPr/>
         </p:nvGraphicFramePr>
@@ -5663,7 +5836,7 @@
 </file>
 
 <file path=ppt/slides/slide3.xml><?xml version="1.0" encoding="utf-8"?>
-<p:sld xmlns:a="http://schemas.openxmlformats.org/drawingml/2006/main" xmlns:p="http://schemas.openxmlformats.org/presentationml/2006/main">
+<p:sld xmlns:p="http://schemas.openxmlformats.org/presentationml/2006/main">
   <p:cSld>
     <p:spTree>
       <p:nvGrpSpPr>
@@ -5674,8 +5847,8 @@
       <p:grpSpPr/>
       <p:sp>
         <p:nvSpPr>
-          <p:cNvPr id="10026" name="TextBox 1"/>
-          <p:cNvSpPr/>
+          <p:cNvPr id="100028" name="TextBox 1"/>
+          <p:cNvSpPr txBox="1"/>
           <p:nvPr/>
         </p:nvSpPr>
         <p:spPr>
@@ -5686,11 +5859,6 @@
           <a:prstGeom xmlns:a="http://schemas.openxmlformats.org/drawingml/2006/main" prst="rect">
             <a:avLst/>
           </a:prstGeom>
-          <a:ln xmlns:a="http://schemas.openxmlformats.org/drawingml/2006/main" w="9525">
-            <a:solidFill>
-              <a:srgbClr val="595959"/>
-            </a:solidFill>
-          </a:ln>
         </p:spPr>
         <p:txBody>
           <a:bodyPr xmlns:a="http://schemas.openxmlformats.org/drawingml/2006/main"/>
@@ -5705,8 +5873,8 @@
       </p:sp>
       <p:sp>
         <p:nvSpPr>
-          <p:cNvPr id="10027" name="TextBox 2"/>
-          <p:cNvSpPr/>
+          <p:cNvPr id="100029" name="TextBox 2"/>
+          <p:cNvSpPr txBox="1"/>
           <p:nvPr/>
         </p:nvSpPr>
         <p:spPr>
@@ -5717,11 +5885,6 @@
           <a:prstGeom xmlns:a="http://schemas.openxmlformats.org/drawingml/2006/main" prst="rect">
             <a:avLst/>
           </a:prstGeom>
-          <a:ln xmlns:a="http://schemas.openxmlformats.org/drawingml/2006/main" w="9525">
-            <a:solidFill>
-              <a:srgbClr val="595959"/>
-            </a:solidFill>
-          </a:ln>
         </p:spPr>
         <p:txBody>
           <a:bodyPr xmlns:a="http://schemas.openxmlformats.org/drawingml/2006/main"/>
@@ -5736,7 +5899,7 @@
       </p:sp>
       <p:graphicFrame>
         <p:nvGraphicFramePr>
-          <p:cNvPr id="10028" name="Table 1"/>
+          <p:cNvPr id="100030" name="Table 1"/>
           <p:cNvGraphicFramePr/>
           <p:nvPr/>
         </p:nvGraphicFramePr>
@@ -6406,8 +6569,8 @@
       </p:graphicFrame>
       <p:sp>
         <p:nvSpPr>
-          <p:cNvPr id="10029" name="TextBox 3"/>
-          <p:cNvSpPr/>
+          <p:cNvPr id="100031" name="TextBox 3"/>
+          <p:cNvSpPr txBox="1"/>
           <p:nvPr/>
         </p:nvSpPr>
         <p:spPr>
@@ -6418,11 +6581,6 @@
           <a:prstGeom xmlns:a="http://schemas.openxmlformats.org/drawingml/2006/main" prst="rect">
             <a:avLst/>
           </a:prstGeom>
-          <a:ln xmlns:a="http://schemas.openxmlformats.org/drawingml/2006/main" w="9525">
-            <a:solidFill>
-              <a:srgbClr val="595959"/>
-            </a:solidFill>
-          </a:ln>
         </p:spPr>
         <p:txBody>
           <a:bodyPr xmlns:a="http://schemas.openxmlformats.org/drawingml/2006/main"/>
@@ -6437,7 +6595,7 @@
       </p:sp>
       <p:graphicFrame>
         <p:nvGraphicFramePr>
-          <p:cNvPr id="10030" name="Table 2"/>
+          <p:cNvPr id="100032" name="Table 2"/>
           <p:cNvGraphicFramePr/>
           <p:nvPr/>
         </p:nvGraphicFramePr>
